--- a/docs/loki-mode-presentation.pptx
+++ b/docs/loki-mode-presentation.pptx
@@ -1803,6 +1803,10 @@
           </a:solidFill>
           <a:ln/>
         </p:spPr>
+        <p:txBody>
+          <a:bodyPr/>
+          <a:p/>
+        </p:txBody>
       </p:sp>
       <p:sp>
         <p:nvSpPr>
@@ -1823,6 +1827,10 @@
           </a:solidFill>
           <a:ln/>
         </p:spPr>
+        <p:txBody>
+          <a:bodyPr/>
+          <a:p/>
+        </p:txBody>
       </p:sp>
       <p:sp>
         <p:nvSpPr>
@@ -2029,7 +2037,7 @@
                 <a:ea typeface="JetBrains Mono" pitchFamily="34" charset="-122"/>
                 <a:cs typeface="JetBrains Mono" pitchFamily="34" charset="-120"/>
               </a:rPr>
-              <a:t> Powered by Autonomi (v6.6.0)</a:t>
+              <a:t> Powered by Autonomi (v7.24.0)</a:t>
             </a:r>
             <a:endParaRPr lang="en-US" sz="834" dirty="0"/>
           </a:p>
@@ -2061,6 +2069,10 @@
             <a:prstDash val="solid"/>
           </a:ln>
         </p:spPr>
+        <p:txBody>
+          <a:bodyPr/>
+          <a:p/>
+        </p:txBody>
       </p:sp>
       <p:pic>
         <p:nvPicPr>
@@ -2112,6 +2124,10 @@
             <a:prstDash val="solid"/>
           </a:ln>
         </p:spPr>
+        <p:txBody>
+          <a:bodyPr/>
+          <a:p/>
+        </p:txBody>
       </p:sp>
       <p:pic>
         <p:nvPicPr>
@@ -2163,6 +2179,10 @@
             <a:prstDash val="solid"/>
           </a:ln>
         </p:spPr>
+        <p:txBody>
+          <a:bodyPr/>
+          <a:p/>
+        </p:txBody>
       </p:sp>
       <p:pic>
         <p:nvPicPr>
@@ -2214,6 +2234,10 @@
             <a:prstDash val="solid"/>
           </a:ln>
         </p:spPr>
+        <p:txBody>
+          <a:bodyPr/>
+          <a:p/>
+        </p:txBody>
       </p:sp>
       <p:pic>
         <p:nvPicPr>
@@ -2265,6 +2289,10 @@
             <a:prstDash val="solid"/>
           </a:ln>
         </p:spPr>
+        <p:txBody>
+          <a:bodyPr/>
+          <a:p/>
+        </p:txBody>
       </p:sp>
       <p:pic>
         <p:nvPicPr>
@@ -2316,6 +2344,10 @@
             <a:prstDash val="solid"/>
           </a:ln>
         </p:spPr>
+        <p:txBody>
+          <a:bodyPr/>
+          <a:p/>
+        </p:txBody>
       </p:sp>
       <p:pic>
         <p:nvPicPr>
@@ -2365,6 +2397,10 @@
             <a:prstDash val="solid"/>
           </a:ln>
         </p:spPr>
+        <p:txBody>
+          <a:bodyPr/>
+          <a:p/>
+        </p:txBody>
       </p:sp>
       <p:pic>
         <p:nvPicPr>
@@ -2416,6 +2452,10 @@
             <a:prstDash val="solid"/>
           </a:ln>
         </p:spPr>
+        <p:txBody>
+          <a:bodyPr/>
+          <a:p/>
+        </p:txBody>
       </p:sp>
       <p:sp>
         <p:nvSpPr>
@@ -2455,7 +2495,7 @@
                 <a:ea typeface="JetBrains Mono" pitchFamily="34" charset="-122"/>
                 <a:cs typeface="JetBrains Mono" pitchFamily="34" charset="-120"/>
               </a:rPr>
-              <a:t>v6.6.0</a:t>
+              <a:t>v7.24.0</a:t>
             </a:r>
             <a:endParaRPr lang="en-US" sz="727" dirty="0"/>
           </a:p>
@@ -2714,6 +2754,10 @@
             <a:prstDash val="solid"/>
           </a:ln>
         </p:spPr>
+        <p:txBody>
+          <a:bodyPr/>
+          <a:p/>
+        </p:txBody>
       </p:sp>
       <p:pic>
         <p:nvPicPr>
@@ -2811,6 +2855,10 @@
             <a:prstDash val="solid"/>
           </a:ln>
         </p:spPr>
+        <p:txBody>
+          <a:bodyPr/>
+          <a:p/>
+        </p:txBody>
       </p:sp>
       <p:pic>
         <p:nvPicPr>
@@ -2908,6 +2956,10 @@
             <a:prstDash val="solid"/>
           </a:ln>
         </p:spPr>
+        <p:txBody>
+          <a:bodyPr/>
+          <a:p/>
+        </p:txBody>
       </p:sp>
       <p:pic>
         <p:nvPicPr>
@@ -3005,6 +3057,10 @@
             <a:prstDash val="solid"/>
           </a:ln>
         </p:spPr>
+        <p:txBody>
+          <a:bodyPr/>
+          <a:p/>
+        </p:txBody>
       </p:sp>
       <p:pic>
         <p:nvPicPr>
@@ -3745,7 +3801,7 @@
                 <a:ea typeface="Inter" pitchFamily="34" charset="-122"/>
                 <a:cs typeface="Inter" pitchFamily="34" charset="-120"/>
               </a:rPr>
-              <a:t>Loki Mode v6.6.0 is the most advanced autonomous framework for production software delivery. Join the Autonomi revolution and ship better code, faster.</a:t>
+              <a:t>Loki Mode v7.24.0 is the most advanced autonomous framework for production software delivery. Join the Autonomi revolution and ship better code, faster.</a:t>
             </a:r>
             <a:endParaRPr lang="en-US" sz="1269" dirty="0"/>
           </a:p>
@@ -3913,6 +3969,10 @@
             <a:prstDash val="solid"/>
           </a:ln>
         </p:spPr>
+        <p:txBody>
+          <a:bodyPr/>
+          <a:p/>
+        </p:txBody>
       </p:sp>
       <p:sp>
         <p:nvSpPr>
@@ -3935,6 +3995,10 @@
           </a:solidFill>
           <a:ln/>
         </p:spPr>
+        <p:txBody>
+          <a:bodyPr/>
+          <a:p/>
+        </p:txBody>
       </p:sp>
       <p:sp>
         <p:nvSpPr>
@@ -3955,6 +4019,10 @@
           </a:solidFill>
           <a:ln/>
         </p:spPr>
+        <p:txBody>
+          <a:bodyPr/>
+          <a:p/>
+        </p:txBody>
       </p:sp>
       <p:sp>
         <p:nvSpPr>
@@ -4240,7 +4308,7 @@
                 <a:ea typeface="JetBrains Mono" pitchFamily="34" charset="-122"/>
                 <a:cs typeface="JetBrains Mono" pitchFamily="34" charset="-120"/>
               </a:rPr>
-              <a:t> # Quality Gates: v6.6.0 Ready</a:t>
+              <a:t> # Quality Gates: v7.24.0 Ready</a:t>
             </a:r>
             <a:endParaRPr lang="en-US" sz="727" dirty="0"/>
           </a:p>
@@ -4435,6 +4503,10 @@
             <a:prstDash val="solid"/>
           </a:ln>
         </p:spPr>
+        <p:txBody>
+          <a:bodyPr/>
+          <a:p/>
+        </p:txBody>
       </p:sp>
       <p:sp>
         <p:nvSpPr>
@@ -4508,6 +4580,10 @@
             <a:prstDash val="solid"/>
           </a:ln>
         </p:spPr>
+        <p:txBody>
+          <a:bodyPr/>
+          <a:p/>
+        </p:txBody>
       </p:sp>
       <p:sp>
         <p:nvSpPr>
@@ -4581,6 +4657,10 @@
             <a:prstDash val="solid"/>
           </a:ln>
         </p:spPr>
+        <p:txBody>
+          <a:bodyPr/>
+          <a:p/>
+        </p:txBody>
       </p:sp>
       <p:sp>
         <p:nvSpPr>
@@ -4722,6 +4802,10 @@
             <a:prstDash val="solid"/>
           </a:ln>
         </p:spPr>
+        <p:txBody>
+          <a:bodyPr/>
+          <a:p/>
+        </p:txBody>
       </p:sp>
       <p:sp>
         <p:nvSpPr>
@@ -4795,6 +4879,10 @@
             <a:prstDash val="solid"/>
           </a:ln>
         </p:spPr>
+        <p:txBody>
+          <a:bodyPr/>
+          <a:p/>
+        </p:txBody>
       </p:sp>
       <p:sp>
         <p:nvSpPr>
@@ -4868,6 +4956,10 @@
             <a:prstDash val="solid"/>
           </a:ln>
         </p:spPr>
+        <p:txBody>
+          <a:bodyPr/>
+          <a:p/>
+        </p:txBody>
       </p:sp>
       <p:sp>
         <p:nvSpPr>
@@ -4932,6 +5024,10 @@
           </a:solidFill>
           <a:ln/>
         </p:spPr>
+        <p:txBody>
+          <a:bodyPr/>
+          <a:p/>
+        </p:txBody>
       </p:sp>
       <p:sp>
         <p:nvSpPr>
@@ -5377,6 +5473,10 @@
             <a:prstDash val="solid"/>
           </a:ln>
         </p:spPr>
+        <p:txBody>
+          <a:bodyPr/>
+          <a:p/>
+        </p:txBody>
       </p:sp>
       <p:sp>
         <p:nvSpPr>
@@ -5562,6 +5662,10 @@
             <a:prstDash val="solid"/>
           </a:ln>
         </p:spPr>
+        <p:txBody>
+          <a:bodyPr/>
+          <a:p/>
+        </p:txBody>
       </p:sp>
       <p:sp>
         <p:nvSpPr>
@@ -5747,6 +5851,10 @@
             <a:prstDash val="solid"/>
           </a:ln>
         </p:spPr>
+        <p:txBody>
+          <a:bodyPr/>
+          <a:p/>
+        </p:txBody>
       </p:sp>
       <p:sp>
         <p:nvSpPr>
@@ -5932,6 +6040,10 @@
             <a:prstDash val="solid"/>
           </a:ln>
         </p:spPr>
+        <p:txBody>
+          <a:bodyPr/>
+          <a:p/>
+        </p:txBody>
       </p:sp>
       <p:sp>
         <p:nvSpPr>
@@ -6117,6 +6229,10 @@
             <a:prstDash val="solid"/>
           </a:ln>
         </p:spPr>
+        <p:txBody>
+          <a:bodyPr/>
+          <a:p/>
+        </p:txBody>
       </p:sp>
       <p:sp>
         <p:nvSpPr>
@@ -6302,6 +6418,10 @@
             <a:prstDash val="solid"/>
           </a:ln>
         </p:spPr>
+        <p:txBody>
+          <a:bodyPr/>
+          <a:p/>
+        </p:txBody>
       </p:sp>
       <p:sp>
         <p:nvSpPr>
@@ -6487,6 +6607,10 @@
             <a:prstDash val="solid"/>
           </a:ln>
         </p:spPr>
+        <p:txBody>
+          <a:bodyPr/>
+          <a:p/>
+        </p:txBody>
       </p:sp>
       <p:sp>
         <p:nvSpPr>
@@ -6672,6 +6796,10 @@
             <a:prstDash val="solid"/>
           </a:ln>
         </p:spPr>
+        <p:txBody>
+          <a:bodyPr/>
+          <a:p/>
+        </p:txBody>
       </p:sp>
       <p:sp>
         <p:nvSpPr>
@@ -6782,6 +6910,10 @@
           </a:solidFill>
           <a:ln/>
         </p:spPr>
+        <p:txBody>
+          <a:bodyPr/>
+          <a:p/>
+        </p:txBody>
       </p:sp>
       <p:sp>
         <p:nvSpPr>
@@ -6855,6 +6987,10 @@
             <a:prstDash val="solid"/>
           </a:ln>
         </p:spPr>
+        <p:txBody>
+          <a:bodyPr/>
+          <a:p/>
+        </p:txBody>
       </p:sp>
       <p:sp>
         <p:nvSpPr>
@@ -7063,6 +7199,10 @@
             <a:prstDash val="solid"/>
           </a:ln>
         </p:spPr>
+        <p:txBody>
+          <a:bodyPr/>
+          <a:p/>
+        </p:txBody>
       </p:sp>
       <p:pic>
         <p:nvPicPr>
@@ -7226,6 +7366,10 @@
             <a:prstDash val="solid"/>
           </a:ln>
         </p:spPr>
+        <p:txBody>
+          <a:bodyPr/>
+          <a:p/>
+        </p:txBody>
       </p:sp>
       <p:pic>
         <p:nvPicPr>
@@ -7389,6 +7533,10 @@
             <a:prstDash val="solid"/>
           </a:ln>
         </p:spPr>
+        <p:txBody>
+          <a:bodyPr/>
+          <a:p/>
+        </p:txBody>
       </p:sp>
       <p:pic>
         <p:nvPicPr>
@@ -7552,6 +7700,10 @@
             <a:prstDash val="solid"/>
           </a:ln>
         </p:spPr>
+        <p:txBody>
+          <a:bodyPr/>
+          <a:p/>
+        </p:txBody>
       </p:sp>
       <p:sp>
         <p:nvSpPr>
@@ -7786,6 +7938,10 @@
             <a:prstDash val="solid"/>
           </a:ln>
         </p:spPr>
+        <p:txBody>
+          <a:bodyPr/>
+          <a:p/>
+        </p:txBody>
       </p:sp>
       <p:pic>
         <p:nvPicPr>
@@ -8108,6 +8264,10 @@
             <a:prstDash val="solid"/>
           </a:ln>
         </p:spPr>
+        <p:txBody>
+          <a:bodyPr/>
+          <a:p/>
+        </p:txBody>
       </p:sp>
       <p:sp>
         <p:nvSpPr>
@@ -8225,6 +8385,10 @@
             <a:prstDash val="solid"/>
           </a:ln>
         </p:spPr>
+        <p:txBody>
+          <a:bodyPr/>
+          <a:p/>
+        </p:txBody>
       </p:sp>
       <p:sp>
         <p:nvSpPr>
@@ -8342,6 +8506,10 @@
             <a:prstDash val="solid"/>
           </a:ln>
         </p:spPr>
+        <p:txBody>
+          <a:bodyPr/>
+          <a:p/>
+        </p:txBody>
       </p:sp>
       <p:sp>
         <p:nvSpPr>
@@ -8459,6 +8627,10 @@
             <a:prstDash val="solid"/>
           </a:ln>
         </p:spPr>
+        <p:txBody>
+          <a:bodyPr/>
+          <a:p/>
+        </p:txBody>
       </p:sp>
       <p:sp>
         <p:nvSpPr>
@@ -8576,6 +8748,10 @@
             <a:prstDash val="solid"/>
           </a:ln>
         </p:spPr>
+        <p:txBody>
+          <a:bodyPr/>
+          <a:p/>
+        </p:txBody>
       </p:sp>
       <p:sp>
         <p:nvSpPr>
@@ -8693,6 +8869,10 @@
             <a:prstDash val="solid"/>
           </a:ln>
         </p:spPr>
+        <p:txBody>
+          <a:bodyPr/>
+          <a:p/>
+        </p:txBody>
       </p:sp>
       <p:sp>
         <p:nvSpPr>
@@ -8810,6 +8990,10 @@
             <a:prstDash val="solid"/>
           </a:ln>
         </p:spPr>
+        <p:txBody>
+          <a:bodyPr/>
+          <a:p/>
+        </p:txBody>
       </p:sp>
       <p:sp>
         <p:nvSpPr>
@@ -8927,6 +9111,10 @@
             <a:prstDash val="solid"/>
           </a:ln>
         </p:spPr>
+        <p:txBody>
+          <a:bodyPr/>
+          <a:p/>
+        </p:txBody>
       </p:sp>
       <p:sp>
         <p:nvSpPr>
@@ -9044,6 +9232,10 @@
             <a:prstDash val="solid"/>
           </a:ln>
         </p:spPr>
+        <p:txBody>
+          <a:bodyPr/>
+          <a:p/>
+        </p:txBody>
       </p:sp>
       <p:sp>
         <p:nvSpPr>
@@ -9159,6 +9351,10 @@
             <a:prstDash val="solid"/>
           </a:ln>
         </p:spPr>
+        <p:txBody>
+          <a:bodyPr/>
+          <a:p/>
+        </p:txBody>
       </p:sp>
       <p:sp>
         <p:nvSpPr>
@@ -9330,7 +9526,7 @@
                 <a:ea typeface="JetBrains Mono" pitchFamily="34" charset="-122"/>
                 <a:cs typeface="JetBrains Mono" pitchFamily="34" charset="-120"/>
               </a:rPr>
-              <a:t>SWE-bench: 299/300 Patches</a:t>
+              <a:t/>
             </a:r>
             <a:pPr algn="ctr" indent="0" marL="0">
               <a:lnSpc>
@@ -9492,6 +9688,10 @@
             <a:prstDash val="solid"/>
           </a:ln>
         </p:spPr>
+        <p:txBody>
+          <a:bodyPr/>
+          <a:p/>
+        </p:txBody>
       </p:sp>
       <p:pic>
         <p:nvPicPr>
@@ -9555,7 +9755,7 @@
                 <a:ea typeface="Inter" pitchFamily="34" charset="-122"/>
                 <a:cs typeface="Inter" pitchFamily="34" charset="-120"/>
               </a:rPr>
-              <a:t>5-PROVIDER ERA</a:t>
+              <a:t>4-PROVIDER ERA</a:t>
             </a:r>
             <a:endParaRPr lang="en-US" sz="1193" dirty="0"/>
           </a:p>
@@ -9929,7 +10129,7 @@
                 <a:ea typeface="JetBrains Mono" pitchFamily="34" charset="-122"/>
                 <a:cs typeface="JetBrains Mono" pitchFamily="34" charset="-120"/>
               </a:rPr>
-              <a:t>Codex/Gemini</a:t>
+              <a:t>Codex</a:t>
             </a:r>
             <a:pPr algn="l" indent="0" marL="0">
               <a:lnSpc>
@@ -9997,6 +10197,10 @@
             <a:prstDash val="solid"/>
           </a:ln>
         </p:spPr>
+        <p:txBody>
+          <a:bodyPr/>
+          <a:p/>
+        </p:txBody>
       </p:sp>
       <p:pic>
         <p:nvPicPr>
@@ -10468,6 +10672,10 @@
             <a:prstDash val="solid"/>
           </a:ln>
         </p:spPr>
+        <p:txBody>
+          <a:bodyPr/>
+          <a:p/>
+        </p:txBody>
       </p:sp>
       <p:pic>
         <p:nvPicPr>
@@ -11015,6 +11223,10 @@
             <a:prstDash val="solid"/>
           </a:ln>
         </p:spPr>
+        <p:txBody>
+          <a:bodyPr/>
+          <a:p/>
+        </p:txBody>
       </p:sp>
       <p:pic>
         <p:nvPicPr>
@@ -11418,6 +11630,10 @@
             <a:prstDash val="solid"/>
           </a:ln>
         </p:spPr>
+        <p:txBody>
+          <a:bodyPr/>
+          <a:p/>
+        </p:txBody>
       </p:sp>
       <p:pic>
         <p:nvPicPr>
@@ -11821,6 +12037,10 @@
             <a:prstDash val="solid"/>
           </a:ln>
         </p:spPr>
+        <p:txBody>
+          <a:bodyPr/>
+          <a:p/>
+        </p:txBody>
       </p:sp>
       <p:pic>
         <p:nvPicPr>
@@ -12190,7 +12410,7 @@
                 <a:ea typeface="Inter" pitchFamily="34" charset="-122"/>
                 <a:cs typeface="Inter" pitchFamily="34" charset="-120"/>
               </a:rPr>
-              <a:t>WebSocket monitoring</a:t>
+              <a:t>WebSocket monitoring + Live App Preview</a:t>
             </a:r>
             <a:endParaRPr lang="en-US" sz="784" dirty="0"/>
           </a:p>
@@ -12315,6 +12535,10 @@
             <a:prstDash val="solid"/>
           </a:ln>
         </p:spPr>
+        <p:txBody>
+          <a:bodyPr/>
+          <a:p/>
+        </p:txBody>
       </p:sp>
       <p:pic>
         <p:nvPicPr>
@@ -12412,6 +12636,10 @@
             <a:prstDash val="solid"/>
           </a:ln>
         </p:spPr>
+        <p:txBody>
+          <a:bodyPr/>
+          <a:p/>
+        </p:txBody>
       </p:sp>
       <p:pic>
         <p:nvPicPr>
@@ -12553,6 +12781,10 @@
             <a:prstDash val="solid"/>
           </a:ln>
         </p:spPr>
+        <p:txBody>
+          <a:bodyPr/>
+          <a:p/>
+        </p:txBody>
       </p:sp>
       <p:sp>
         <p:nvSpPr>
@@ -12626,6 +12858,10 @@
             <a:prstDash val="solid"/>
           </a:ln>
         </p:spPr>
+        <p:txBody>
+          <a:bodyPr/>
+          <a:p/>
+        </p:txBody>
       </p:sp>
       <p:sp>
         <p:nvSpPr>
@@ -12699,6 +12935,10 @@
             <a:prstDash val="solid"/>
           </a:ln>
         </p:spPr>
+        <p:txBody>
+          <a:bodyPr/>
+          <a:p/>
+        </p:txBody>
       </p:sp>
       <p:sp>
         <p:nvSpPr>
@@ -12840,6 +13080,10 @@
             <a:prstDash val="solid"/>
           </a:ln>
         </p:spPr>
+        <p:txBody>
+          <a:bodyPr/>
+          <a:p/>
+        </p:txBody>
       </p:sp>
       <p:pic>
         <p:nvPicPr>
@@ -12981,6 +13225,10 @@
             <a:prstDash val="solid"/>
           </a:ln>
         </p:spPr>
+        <p:txBody>
+          <a:bodyPr/>
+          <a:p/>
+        </p:txBody>
       </p:sp>
       <p:sp>
         <p:nvSpPr>
@@ -13054,6 +13302,10 @@
             <a:prstDash val="solid"/>
           </a:ln>
         </p:spPr>
+        <p:txBody>
+          <a:bodyPr/>
+          <a:p/>
+        </p:txBody>
       </p:sp>
       <p:sp>
         <p:nvSpPr>
@@ -13127,6 +13379,10 @@
             <a:prstDash val="solid"/>
           </a:ln>
         </p:spPr>
+        <p:txBody>
+          <a:bodyPr/>
+          <a:p/>
+        </p:txBody>
       </p:sp>
       <p:sp>
         <p:nvSpPr>
@@ -13268,6 +13524,10 @@
             <a:prstDash val="solid"/>
           </a:ln>
         </p:spPr>
+        <p:txBody>
+          <a:bodyPr/>
+          <a:p/>
+        </p:txBody>
       </p:sp>
       <p:pic>
         <p:nvPicPr>
@@ -13409,6 +13669,10 @@
             <a:prstDash val="solid"/>
           </a:ln>
         </p:spPr>
+        <p:txBody>
+          <a:bodyPr/>
+          <a:p/>
+        </p:txBody>
       </p:sp>
       <p:sp>
         <p:nvSpPr>
@@ -13482,6 +13746,10 @@
             <a:prstDash val="solid"/>
           </a:ln>
         </p:spPr>
+        <p:txBody>
+          <a:bodyPr/>
+          <a:p/>
+        </p:txBody>
       </p:sp>
       <p:sp>
         <p:nvSpPr>
@@ -13555,6 +13823,10 @@
             <a:prstDash val="solid"/>
           </a:ln>
         </p:spPr>
+        <p:txBody>
+          <a:bodyPr/>
+          <a:p/>
+        </p:txBody>
       </p:sp>
       <p:sp>
         <p:nvSpPr>
@@ -13696,6 +13968,10 @@
             <a:prstDash val="solid"/>
           </a:ln>
         </p:spPr>
+        <p:txBody>
+          <a:bodyPr/>
+          <a:p/>
+        </p:txBody>
       </p:sp>
       <p:pic>
         <p:nvPicPr>
@@ -13837,6 +14113,10 @@
             <a:prstDash val="solid"/>
           </a:ln>
         </p:spPr>
+        <p:txBody>
+          <a:bodyPr/>
+          <a:p/>
+        </p:txBody>
       </p:sp>
       <p:sp>
         <p:nvSpPr>
@@ -13910,6 +14190,10 @@
             <a:prstDash val="solid"/>
           </a:ln>
         </p:spPr>
+        <p:txBody>
+          <a:bodyPr/>
+          <a:p/>
+        </p:txBody>
       </p:sp>
       <p:sp>
         <p:nvSpPr>
@@ -13983,6 +14267,10 @@
             <a:prstDash val="solid"/>
           </a:ln>
         </p:spPr>
+        <p:txBody>
+          <a:bodyPr/>
+          <a:p/>
+        </p:txBody>
       </p:sp>
       <p:sp>
         <p:nvSpPr>
@@ -14183,7 +14471,7 @@
                 <a:ea typeface="Inter" pitchFamily="34" charset="-122"/>
                 <a:cs typeface="Inter" pitchFamily="34" charset="-120"/>
               </a:rPr>
-              <a:t>Why Loki Mode is Better (v6.6.0)</a:t>
+              <a:t>Why Loki Mode is Better (v7.24.0)</a:t>
             </a:r>
             <a:endParaRPr lang="en-US" sz="2436" dirty="0"/>
           </a:p>
@@ -14252,6 +14540,10 @@
           </a:solidFill>
           <a:ln/>
         </p:spPr>
+        <p:txBody>
+          <a:bodyPr/>
+          <a:p/>
+        </p:txBody>
       </p:sp>
       <p:sp>
         <p:nvSpPr>
@@ -14272,6 +14564,10 @@
           </a:solidFill>
           <a:ln/>
         </p:spPr>
+        <p:txBody>
+          <a:bodyPr/>
+          <a:p/>
+        </p:txBody>
       </p:sp>
       <p:sp>
         <p:nvSpPr>
@@ -14426,6 +14722,10 @@
           </a:solidFill>
           <a:ln/>
         </p:spPr>
+        <p:txBody>
+          <a:bodyPr/>
+          <a:p/>
+        </p:txBody>
       </p:sp>
       <p:sp>
         <p:nvSpPr>
@@ -14446,6 +14746,10 @@
           </a:solidFill>
           <a:ln/>
         </p:spPr>
+        <p:txBody>
+          <a:bodyPr/>
+          <a:p/>
+        </p:txBody>
       </p:sp>
       <p:sp>
         <p:nvSpPr>
@@ -14466,6 +14770,10 @@
           </a:solidFill>
           <a:ln/>
         </p:spPr>
+        <p:txBody>
+          <a:bodyPr/>
+          <a:p/>
+        </p:txBody>
       </p:sp>
       <p:sp>
         <p:nvSpPr>
@@ -14486,6 +14794,10 @@
           </a:solidFill>
           <a:ln/>
         </p:spPr>
+        <p:txBody>
+          <a:bodyPr/>
+          <a:p/>
+        </p:txBody>
       </p:sp>
       <p:pic>
         <p:nvPicPr>
@@ -14690,6 +15002,10 @@
           </a:solidFill>
           <a:ln/>
         </p:spPr>
+        <p:txBody>
+          <a:bodyPr/>
+          <a:p/>
+        </p:txBody>
       </p:sp>
       <p:sp>
         <p:nvSpPr>
@@ -14710,6 +15026,10 @@
           </a:solidFill>
           <a:ln/>
         </p:spPr>
+        <p:txBody>
+          <a:bodyPr/>
+          <a:p/>
+        </p:txBody>
       </p:sp>
       <p:sp>
         <p:nvSpPr>
@@ -14730,6 +15050,10 @@
           </a:solidFill>
           <a:ln/>
         </p:spPr>
+        <p:txBody>
+          <a:bodyPr/>
+          <a:p/>
+        </p:txBody>
       </p:sp>
       <p:sp>
         <p:nvSpPr>
@@ -14750,6 +15074,10 @@
           </a:solidFill>
           <a:ln/>
         </p:spPr>
+        <p:txBody>
+          <a:bodyPr/>
+          <a:p/>
+        </p:txBody>
       </p:sp>
       <p:pic>
         <p:nvPicPr>
@@ -14954,6 +15282,10 @@
           </a:solidFill>
           <a:ln/>
         </p:spPr>
+        <p:txBody>
+          <a:bodyPr/>
+          <a:p/>
+        </p:txBody>
       </p:sp>
       <p:sp>
         <p:nvSpPr>
@@ -14974,6 +15306,10 @@
           </a:solidFill>
           <a:ln/>
         </p:spPr>
+        <p:txBody>
+          <a:bodyPr/>
+          <a:p/>
+        </p:txBody>
       </p:sp>
       <p:sp>
         <p:nvSpPr>
@@ -14994,6 +15330,10 @@
           </a:solidFill>
           <a:ln/>
         </p:spPr>
+        <p:txBody>
+          <a:bodyPr/>
+          <a:p/>
+        </p:txBody>
       </p:sp>
       <p:sp>
         <p:nvSpPr>
@@ -15014,6 +15354,10 @@
           </a:solidFill>
           <a:ln/>
         </p:spPr>
+        <p:txBody>
+          <a:bodyPr/>
+          <a:p/>
+        </p:txBody>
       </p:sp>
       <p:pic>
         <p:nvPicPr>
@@ -15218,6 +15562,10 @@
           </a:solidFill>
           <a:ln/>
         </p:spPr>
+        <p:txBody>
+          <a:bodyPr/>
+          <a:p/>
+        </p:txBody>
       </p:sp>
       <p:sp>
         <p:nvSpPr>
@@ -15238,6 +15586,10 @@
           </a:solidFill>
           <a:ln/>
         </p:spPr>
+        <p:txBody>
+          <a:bodyPr/>
+          <a:p/>
+        </p:txBody>
       </p:sp>
       <p:sp>
         <p:nvSpPr>
@@ -15258,6 +15610,10 @@
           </a:solidFill>
           <a:ln/>
         </p:spPr>
+        <p:txBody>
+          <a:bodyPr/>
+          <a:p/>
+        </p:txBody>
       </p:sp>
       <p:sp>
         <p:nvSpPr>
@@ -15278,6 +15634,10 @@
           </a:solidFill>
           <a:ln/>
         </p:spPr>
+        <p:txBody>
+          <a:bodyPr/>
+          <a:p/>
+        </p:txBody>
       </p:sp>
       <p:pic>
         <p:nvPicPr>
@@ -15482,6 +15842,10 @@
           </a:solidFill>
           <a:ln/>
         </p:spPr>
+        <p:txBody>
+          <a:bodyPr/>
+          <a:p/>
+        </p:txBody>
       </p:sp>
       <p:sp>
         <p:nvSpPr>
@@ -15502,6 +15866,10 @@
           </a:solidFill>
           <a:ln/>
         </p:spPr>
+        <p:txBody>
+          <a:bodyPr/>
+          <a:p/>
+        </p:txBody>
       </p:sp>
       <p:sp>
         <p:nvSpPr>
@@ -15522,6 +15890,10 @@
           </a:solidFill>
           <a:ln/>
         </p:spPr>
+        <p:txBody>
+          <a:bodyPr/>
+          <a:p/>
+        </p:txBody>
       </p:sp>
       <p:sp>
         <p:nvSpPr>
@@ -15542,6 +15914,10 @@
           </a:solidFill>
           <a:ln/>
         </p:spPr>
+        <p:txBody>
+          <a:bodyPr/>
+          <a:p/>
+        </p:txBody>
       </p:sp>
       <p:pic>
         <p:nvPicPr>
